--- a/content/corejava/DAY-2.pptx
+++ b/content/corejava/DAY-2.pptx
@@ -327,7 +327,7 @@
       </p15:sldGuideLst>
     </p:ext>
     <p:ext uri="http://customooxmlschemas.google.com/">
-      <go:slidesCustomData xmlns:go="http://customooxmlschemas.google.com/" xmlns:ahyp="http://schemas.microsoft.com/office/drawing/2018/hyperlinkcolor" xmlns:p15="http://schemas.microsoft.com/office/powerpoint/2012/main" xmlns:p14="http://schemas.microsoft.com/office/powerpoint/2010/main" xmlns:com="http://schemas.openxmlformats.org/drawingml/2006/compatibility" xmlns:pvml="urn:schemas-microsoft-com:office:powerpoint" xmlns:v="urn:schemas-microsoft-com:vml" xmlns:o="urn:schemas-microsoft-com:office:office" xmlns:dgm="http://schemas.openxmlformats.org/drawingml/2006/diagram" xmlns:c="http://schemas.openxmlformats.org/drawingml/2006/chart" xmlns:mv="urn:schemas-microsoft-com:mac:vml" xmlns:mc="http://schemas.openxmlformats.org/markup-compatibility/2006" xmlns="" r:id="rId77" roundtripDataSignature="AMtx7mjJlKq3TIsvZVvwEbJzq+yho+mD2Q=="/>
+      <go:slidesCustomData xmlns="" xmlns:mc="http://schemas.openxmlformats.org/markup-compatibility/2006" xmlns:mv="urn:schemas-microsoft-com:mac:vml" xmlns:c="http://schemas.openxmlformats.org/drawingml/2006/chart" xmlns:dgm="http://schemas.openxmlformats.org/drawingml/2006/diagram" xmlns:o="urn:schemas-microsoft-com:office:office" xmlns:v="urn:schemas-microsoft-com:vml" xmlns:pvml="urn:schemas-microsoft-com:office:powerpoint" xmlns:com="http://schemas.openxmlformats.org/drawingml/2006/compatibility" xmlns:p14="http://schemas.microsoft.com/office/powerpoint/2010/main" xmlns:p15="http://schemas.microsoft.com/office/powerpoint/2012/main" xmlns:ahyp="http://schemas.microsoft.com/office/drawing/2018/hyperlinkcolor" xmlns:go="http://customooxmlschemas.google.com/" r:id="rId77" roundtripDataSignature="AMtx7mjJlKq3TIsvZVvwEbJzq+yho+mD2Q=="/>
     </p:ext>
   </p:extLst>
 </p:presentation>
@@ -59026,13 +59026,13 @@
         <p:nvCxnSpPr>
           <p:cNvPr id="204" name="Google Shape;204;p7"/>
           <p:cNvCxnSpPr>
-            <a:stCxn id="202" idx="2"/>
+            <a:cxnSpLocks/>
           </p:cNvCxnSpPr>
           <p:nvPr/>
         </p:nvCxnSpPr>
         <p:spPr>
           <a:xfrm flipH="1">
-            <a:off x="4495800" y="2169319"/>
+            <a:off x="4648200" y="1998600"/>
             <a:ext cx="1752600" cy="422400"/>
           </a:xfrm>
           <a:prstGeom prst="straightConnector1">
@@ -59061,13 +59061,13 @@
         <p:nvCxnSpPr>
           <p:cNvPr id="205" name="Google Shape;205;p7"/>
           <p:cNvCxnSpPr>
-            <a:stCxn id="203" idx="2"/>
+            <a:cxnSpLocks/>
           </p:cNvCxnSpPr>
           <p:nvPr/>
         </p:nvCxnSpPr>
         <p:spPr>
           <a:xfrm rot="10800000">
-            <a:off x="3200400" y="3124200"/>
+            <a:off x="3360655" y="2895600"/>
             <a:ext cx="3200400" cy="152400"/>
           </a:xfrm>
           <a:prstGeom prst="straightConnector1">
